--- a/Classification of room occupancy.pptx
+++ b/Classification of room occupancy.pptx
@@ -108,6 +108,11 @@
       </a:defRPr>
     </a:lvl9pPr>
   </p:defaultTextStyle>
+  <p:extLst>
+    <p:ext uri="{EFAFB233-063F-42B5-8137-9DF3F51BA10A}">
+      <p15:sldGuideLst xmlns:p15="http://schemas.microsoft.com/office/powerpoint/2012/main"/>
+    </p:ext>
+  </p:extLst>
 </p:presentation>
 </file>
 
@@ -296,7 +301,7 @@
           <a:p>
             <a:fld id="{142C3214-837E-4CD9-B0F4-2B7F73E4E666}" type="datetimeFigureOut">
               <a:rPr lang="ru-RU" smtClean="0"/>
-              <a:t>29.04.2026</a:t>
+              <a:t>01.05.2026</a:t>
             </a:fld>
             <a:endParaRPr lang="ru-RU"/>
           </a:p>
@@ -594,7 +599,7 @@
           <a:p>
             <a:fld id="{142C3214-837E-4CD9-B0F4-2B7F73E4E666}" type="datetimeFigureOut">
               <a:rPr lang="ru-RU" smtClean="0"/>
-              <a:t>29.04.2026</a:t>
+              <a:t>01.05.2026</a:t>
             </a:fld>
             <a:endParaRPr lang="ru-RU"/>
           </a:p>
@@ -786,7 +791,7 @@
           <a:p>
             <a:fld id="{142C3214-837E-4CD9-B0F4-2B7F73E4E666}" type="datetimeFigureOut">
               <a:rPr lang="ru-RU" smtClean="0"/>
-              <a:t>29.04.2026</a:t>
+              <a:t>01.05.2026</a:t>
             </a:fld>
             <a:endParaRPr lang="ru-RU"/>
           </a:p>
@@ -1047,7 +1052,7 @@
           <a:p>
             <a:fld id="{142C3214-837E-4CD9-B0F4-2B7F73E4E666}" type="datetimeFigureOut">
               <a:rPr lang="ru-RU" smtClean="0"/>
-              <a:t>29.04.2026</a:t>
+              <a:t>01.05.2026</a:t>
             </a:fld>
             <a:endParaRPr lang="ru-RU"/>
           </a:p>
@@ -1471,7 +1476,7 @@
           <a:p>
             <a:fld id="{142C3214-837E-4CD9-B0F4-2B7F73E4E666}" type="datetimeFigureOut">
               <a:rPr lang="ru-RU" smtClean="0"/>
-              <a:t>29.04.2026</a:t>
+              <a:t>01.05.2026</a:t>
             </a:fld>
             <a:endParaRPr lang="ru-RU"/>
           </a:p>
@@ -2008,7 +2013,7 @@
           <a:p>
             <a:fld id="{142C3214-837E-4CD9-B0F4-2B7F73E4E666}" type="datetimeFigureOut">
               <a:rPr lang="ru-RU" smtClean="0"/>
-              <a:t>29.04.2026</a:t>
+              <a:t>01.05.2026</a:t>
             </a:fld>
             <a:endParaRPr lang="ru-RU"/>
           </a:p>
@@ -2872,7 +2877,7 @@
           <a:p>
             <a:fld id="{142C3214-837E-4CD9-B0F4-2B7F73E4E666}" type="datetimeFigureOut">
               <a:rPr lang="ru-RU" smtClean="0"/>
-              <a:t>29.04.2026</a:t>
+              <a:t>01.05.2026</a:t>
             </a:fld>
             <a:endParaRPr lang="ru-RU"/>
           </a:p>
@@ -3042,7 +3047,7 @@
           <a:p>
             <a:fld id="{142C3214-837E-4CD9-B0F4-2B7F73E4E666}" type="datetimeFigureOut">
               <a:rPr lang="ru-RU" smtClean="0"/>
-              <a:t>29.04.2026</a:t>
+              <a:t>01.05.2026</a:t>
             </a:fld>
             <a:endParaRPr lang="ru-RU"/>
           </a:p>
@@ -3226,7 +3231,7 @@
           <a:p>
             <a:fld id="{142C3214-837E-4CD9-B0F4-2B7F73E4E666}" type="datetimeFigureOut">
               <a:rPr lang="ru-RU" smtClean="0"/>
-              <a:t>29.04.2026</a:t>
+              <a:t>01.05.2026</a:t>
             </a:fld>
             <a:endParaRPr lang="ru-RU"/>
           </a:p>
@@ -3396,7 +3401,7 @@
           <a:p>
             <a:fld id="{142C3214-837E-4CD9-B0F4-2B7F73E4E666}" type="datetimeFigureOut">
               <a:rPr lang="ru-RU" smtClean="0"/>
-              <a:t>29.04.2026</a:t>
+              <a:t>01.05.2026</a:t>
             </a:fld>
             <a:endParaRPr lang="ru-RU"/>
           </a:p>
@@ -3640,7 +3645,7 @@
           <a:p>
             <a:fld id="{142C3214-837E-4CD9-B0F4-2B7F73E4E666}" type="datetimeFigureOut">
               <a:rPr lang="ru-RU" smtClean="0"/>
-              <a:t>29.04.2026</a:t>
+              <a:t>01.05.2026</a:t>
             </a:fld>
             <a:endParaRPr lang="ru-RU"/>
           </a:p>
@@ -3876,7 +3881,7 @@
           <a:p>
             <a:fld id="{142C3214-837E-4CD9-B0F4-2B7F73E4E666}" type="datetimeFigureOut">
               <a:rPr lang="ru-RU" smtClean="0"/>
-              <a:t>29.04.2026</a:t>
+              <a:t>01.05.2026</a:t>
             </a:fld>
             <a:endParaRPr lang="ru-RU"/>
           </a:p>
@@ -4342,7 +4347,7 @@
           <a:p>
             <a:fld id="{142C3214-837E-4CD9-B0F4-2B7F73E4E666}" type="datetimeFigureOut">
               <a:rPr lang="ru-RU" smtClean="0"/>
-              <a:t>29.04.2026</a:t>
+              <a:t>01.05.2026</a:t>
             </a:fld>
             <a:endParaRPr lang="ru-RU"/>
           </a:p>
@@ -4460,7 +4465,7 @@
           <a:p>
             <a:fld id="{142C3214-837E-4CD9-B0F4-2B7F73E4E666}" type="datetimeFigureOut">
               <a:rPr lang="ru-RU" smtClean="0"/>
-              <a:t>29.04.2026</a:t>
+              <a:t>01.05.2026</a:t>
             </a:fld>
             <a:endParaRPr lang="ru-RU"/>
           </a:p>
@@ -4555,7 +4560,7 @@
           <a:p>
             <a:fld id="{142C3214-837E-4CD9-B0F4-2B7F73E4E666}" type="datetimeFigureOut">
               <a:rPr lang="ru-RU" smtClean="0"/>
-              <a:t>29.04.2026</a:t>
+              <a:t>01.05.2026</a:t>
             </a:fld>
             <a:endParaRPr lang="ru-RU"/>
           </a:p>
@@ -4810,7 +4815,7 @@
           <a:p>
             <a:fld id="{142C3214-837E-4CD9-B0F4-2B7F73E4E666}" type="datetimeFigureOut">
               <a:rPr lang="ru-RU" smtClean="0"/>
-              <a:t>29.04.2026</a:t>
+              <a:t>01.05.2026</a:t>
             </a:fld>
             <a:endParaRPr lang="ru-RU"/>
           </a:p>
@@ -5110,7 +5115,7 @@
           <a:p>
             <a:fld id="{142C3214-837E-4CD9-B0F4-2B7F73E4E666}" type="datetimeFigureOut">
               <a:rPr lang="ru-RU" smtClean="0"/>
-              <a:t>29.04.2026</a:t>
+              <a:t>01.05.2026</a:t>
             </a:fld>
             <a:endParaRPr lang="ru-RU"/>
           </a:p>
@@ -5344,7 +5349,7 @@
           <a:p>
             <a:fld id="{142C3214-837E-4CD9-B0F4-2B7F73E4E666}" type="datetimeFigureOut">
               <a:rPr lang="ru-RU" smtClean="0"/>
-              <a:t>29.04.2026</a:t>
+              <a:t>01.05.2026</a:t>
             </a:fld>
             <a:endParaRPr lang="ru-RU"/>
           </a:p>
@@ -6444,7 +6449,7 @@
           <a:p>
             <a:r>
               <a:rPr lang="en-US" sz="2400" dirty="0"/>
-              <a:t>2. Data augmentation:</a:t>
+              <a:t>2. Handling class imbalance:</a:t>
             </a:r>
           </a:p>
           <a:p>
@@ -6454,7 +6459,7 @@
             </a:pPr>
             <a:r>
               <a:rPr lang="en-US" sz="2400" dirty="0"/>
-              <a:t> small transformations (shift, scale, color) </a:t>
+              <a:t> inverse class weights </a:t>
             </a:r>
           </a:p>
           <a:p>
@@ -6464,7 +6469,7 @@
             </a:pPr>
             <a:r>
               <a:rPr lang="en-US" sz="2400" dirty="0"/>
-              <a:t>improved generalization</a:t>
+              <a:t>Higher importance for class 3</a:t>
             </a:r>
           </a:p>
           <a:p>
